--- a/curso_es/pptx/S02.pptx
+++ b/curso_es/pptx/S02.pptx
@@ -4268,7 +4268,7 @@
                 </a:solidFill>
                 <a:latin typeface="Nunito Sans"/>
               </a:rPr>
-              <a:t>Kevin dice: «El Athletic juega en Anoeta».</a:t>
+              <a:t>Un chico dice: «El Athletic juega en Anoeta».</a:t>
             </a:r>
           </a:p>
         </p:txBody>
